--- a/public/fun/pack/pptx/weddingpro/결혼식프리미엄_16_소개중심_마린화이트.pptx
+++ b/public/fun/pack/pptx/weddingpro/결혼식프리미엄_16_소개중심_마린화이트.pptx
@@ -113,12 +113,12 @@
   <p:extLst>
     <p:ext uri="{521415D9-36F7-43E2-AB2F-B90AF26B5E84}">
       <p14:sectionLst xmlns:p14="http://schemas.microsoft.com/office/powerpoint/2010/main">
-        <p14:section name="시작" id="{F2F2F61F-76B0-41B4-BF38-66B131B46D1A}">
+        <p14:section name="시작" id="{1B86A104-1448-4C78-9799-2ACDC2695657}">
           <p14:sldIdLst>
             <p14:sldId id="256"/>
           </p14:sldIdLst>
         </p14:section>
-        <p14:section name="본문" id="{800662D3-7578-46BD-B1D5-3CE2CED4FA8A}">
+        <p14:section name="본문" id="{846466AC-1A78-4A72-8E4A-58AA4B61BDBF}">
           <p14:sldIdLst>
             <p14:sldId id="257"/>
             <p14:sldId id="258"/>
@@ -127,7 +127,7 @@
             <p14:sldId id="261"/>
           </p14:sldIdLst>
         </p14:section>
-        <p14:section name="마무리" id="{01FB4048-BB49-4338-99A8-BE240982F9AA}">
+        <p14:section name="마무리" id="{0A3F6E4E-01CD-43A6-A201-94D61E4D379B}">
           <p14:sldIdLst>
             <p14:sldId id="262"/>
           </p14:sldIdLst>
@@ -1592,7 +1592,7 @@
             </a:lvl1pPr>
           </a:lstStyle>
           <a:p>
-            <a:fld id="{83679050-B5F8-4E8E-B413-F5E240C5F49E}" type="slidenum">
+            <a:fld id="{09BF3D56-AD80-4D01-B08B-58436756418C}" type="slidenum">
               <a:rPr lang="en-US"/>
               <a:t>‹#›</a:t>
             </a:fld>
@@ -2347,7 +2347,7 @@
             </a:lvl1pPr>
           </a:lstStyle>
           <a:p>
-            <a:fld id="{DCF1FA4F-7C0D-4EC9-91B4-C209544A504D}" type="slidenum">
+            <a:fld id="{03B74987-2A00-4602-BDCF-2A76942BB406}" type="slidenum">
               <a:rPr lang="en-US"/>
               <a:t>‹#›</a:t>
             </a:fld>
@@ -3017,7 +3017,7 @@
             </a:lvl1pPr>
           </a:lstStyle>
           <a:p>
-            <a:fld id="{86800958-A231-4E1C-BF64-1BEE201D5825}" type="slidenum">
+            <a:fld id="{27B8E977-A389-4C8D-94E7-90ED3689BF48}" type="slidenum">
               <a:rPr lang="en-US"/>
               <a:t>‹#›</a:t>
             </a:fld>
@@ -3908,7 +3908,7 @@
           <a:p>
             <a:r>
               <a:rPr lang="ko-KR"/>
-              <a:t>0000. 00. 00 · 예식장 이름</a:t>
+              <a:t>날짜 입력 · 예식장 이름</a:t>
             </a:r>
           </a:p>
         </p:txBody>
@@ -4143,7 +4143,7 @@
           <a:bodyPr/>
           <a:lstStyle/>
           <a:p>
-            <a:fld id="{EB6BFAB4-7910-45B2-AEED-1F7CF7423162}" type="slidenum">
+            <a:fld id="{6EA7CF8F-42F0-44D9-82AE-564E92B25BCF}" type="slidenum">
               <a:rPr lang="en-US"/>
               <a:t>‹#›</a:t>
             </a:fld>
@@ -4549,7 +4549,7 @@
           <a:bodyPr/>
           <a:lstStyle/>
           <a:p>
-            <a:fld id="{8183C234-FFF1-4F11-906F-947FA73EBC0E}" type="slidenum">
+            <a:fld id="{30462031-3F23-4FB9-B2DE-E23997DA6D25}" type="slidenum">
               <a:rPr lang="en-US"/>
               <a:t>‹#›</a:t>
             </a:fld>
@@ -5151,7 +5151,7 @@
           <a:bodyPr/>
           <a:lstStyle/>
           <a:p>
-            <a:fld id="{B8D6B871-4BE3-4AEB-922D-6433D0F81E9A}" type="slidenum">
+            <a:fld id="{2E50BF96-4B91-4D1F-A596-C48735F31B81}" type="slidenum">
               <a:rPr lang="en-US"/>
               <a:t>‹#›</a:t>
             </a:fld>
@@ -6057,7 +6057,7 @@
           <a:bodyPr/>
           <a:lstStyle/>
           <a:p>
-            <a:fld id="{EB222C2E-BF7A-4047-847A-964043A368F3}" type="slidenum">
+            <a:fld id="{E5B9350B-F47F-42D2-AE20-9A1B13E22662}" type="slidenum">
               <a:rPr lang="en-US"/>
               <a:t>‹#›</a:t>
             </a:fld>
@@ -6145,7 +6145,7 @@
           <a:bodyPr/>
           <a:lstStyle/>
           <a:p>
-            <a:fld id="{50CA5B84-574D-4407-ABBA-5EE35E32B7E7}" type="slidenum">
+            <a:fld id="{7238BE09-4453-4019-BAEA-91A3061C7FD6}" type="slidenum">
               <a:rPr lang="en-US"/>
               <a:t>‹#›</a:t>
             </a:fld>
